--- a/e2e/fixtures/files/deck-many.pptx
+++ b/e2e/fixtures/files/deck-many.pptx
@@ -3163,7 +3163,7 @@
           <a:lstStyle/>
           <a:p>
             <a:r>
-              <a:t>Итоги полугодия</a:t>
+              <a:t>Годовой обзор</a:t>
             </a:r>
           </a:p>
         </p:txBody>
@@ -3184,7 +3184,7 @@
           <a:lstStyle/>
           <a:p>
             <a:r>
-              <a:t>ООО «Ромашка» · январь 2026</a:t>
+              <a:t>Расширенная версия · 60 слайдов · ООО «Ромашка»</a:t>
             </a:r>
           </a:p>
         </p:txBody>
@@ -3223,7 +3223,7 @@
           <a:lstStyle/>
           <a:p>
             <a:r>
-              <a:t>Раздел 9</a:t>
+              <a:t>Слайд 10. Команда</a:t>
             </a:r>
           </a:p>
         </p:txBody>
@@ -3244,23 +3244,25 @@
           <a:lstStyle/>
           <a:p>
             <a:r>
-              <a:t>Ключевой показатель 9</a:t>
-            </a:r>
-          </a:p>
-          <a:p>
-            <a:pPr lvl="1">
-              <a:defRPr sz="1800"/>
-            </a:pPr>
-            <a:r>
-              <a:t>Пояснение 9.1</a:t>
-            </a:r>
-          </a:p>
-          <a:p>
-            <a:pPr lvl="1">
-              <a:defRPr sz="1800"/>
-            </a:pPr>
-            <a:r>
-              <a:t>Пояснение 9.2</a:t>
+              <a:t>Руководитель проекта — П. П. Петров</a:t>
+            </a:r>
+          </a:p>
+          <a:p>
+            <a:pPr lvl="1"/>
+            <a:r>
+              <a:t>Аналитик — А. В. Кузнецова</a:t>
+            </a:r>
+          </a:p>
+          <a:p>
+            <a:pPr lvl="1"/>
+            <a:r>
+              <a:t>Юрист — С. С. Сидоров</a:t>
+            </a:r>
+          </a:p>
+          <a:p>
+            <a:pPr lvl="1"/>
+            <a:r>
+              <a:t>Раздел 10: показатель за период — 1570 условных единиц</a:t>
             </a:r>
           </a:p>
         </p:txBody>
@@ -3299,7 +3301,7 @@
           <a:lstStyle/>
           <a:p>
             <a:r>
-              <a:t>Раздел 10</a:t>
+              <a:t>Слайд 11. Метрики (KPI)</a:t>
             </a:r>
           </a:p>
         </p:txBody>
@@ -3320,23 +3322,25 @@
           <a:lstStyle/>
           <a:p>
             <a:r>
-              <a:t>Ключевой показатель 10</a:t>
-            </a:r>
-          </a:p>
-          <a:p>
-            <a:pPr lvl="1">
-              <a:defRPr sz="1800"/>
-            </a:pPr>
-            <a:r>
-              <a:t>Пояснение 10.1</a:t>
-            </a:r>
-          </a:p>
-          <a:p>
-            <a:pPr lvl="1">
-              <a:defRPr sz="1800"/>
-            </a:pPr>
-            <a:r>
-              <a:t>Пояснение 10.2</a:t>
+              <a:t>Time to sign — 6 дней</a:t>
+            </a:r>
+          </a:p>
+          <a:p>
+            <a:pPr lvl="1"/>
+            <a:r>
+              <a:t>Contract coverage — 92%</a:t>
+            </a:r>
+          </a:p>
+          <a:p>
+            <a:pPr lvl="1"/>
+            <a:r>
+              <a:t>Renewal rate — 78%</a:t>
+            </a:r>
+          </a:p>
+          <a:p>
+            <a:pPr lvl="1"/>
+            <a:r>
+              <a:t>Раздел 11: показатель за период — 1607 условных единиц</a:t>
             </a:r>
           </a:p>
         </p:txBody>
@@ -3375,7 +3379,7 @@
           <a:lstStyle/>
           <a:p>
             <a:r>
-              <a:t>Раздел 11</a:t>
+              <a:t>Слайд 12. Итоги квартала</a:t>
             </a:r>
           </a:p>
         </p:txBody>
@@ -3396,23 +3400,25 @@
           <a:lstStyle/>
           <a:p>
             <a:r>
-              <a:t>Ключевой показатель 11</a:t>
-            </a:r>
-          </a:p>
-          <a:p>
-            <a:pPr lvl="1">
-              <a:defRPr sz="1800"/>
-            </a:pPr>
-            <a:r>
-              <a:t>Пояснение 11.1</a:t>
-            </a:r>
-          </a:p>
-          <a:p>
-            <a:pPr lvl="1">
-              <a:defRPr sz="1800"/>
-            </a:pPr>
-            <a:r>
-              <a:t>Пояснение 11.2</a:t>
+              <a:t>Выручка выросла на 12% к предыдущему кварталу</a:t>
+            </a:r>
+          </a:p>
+          <a:p>
+            <a:pPr lvl="1"/>
+            <a:r>
+              <a:t>Подписано 8 новых договоров</a:t>
+            </a:r>
+          </a:p>
+          <a:p>
+            <a:pPr lvl="1"/>
+            <a:r>
+              <a:t>Средний срок согласования — 6 рабочих дней</a:t>
+            </a:r>
+          </a:p>
+          <a:p>
+            <a:pPr lvl="1"/>
+            <a:r>
+              <a:t>Раздел 12: показатель за период — 1644 условных единиц</a:t>
             </a:r>
           </a:p>
         </p:txBody>
@@ -3451,7 +3457,7 @@
           <a:lstStyle/>
           <a:p>
             <a:r>
-              <a:t>Раздел 12</a:t>
+              <a:t>Слайд 13. Структура портфеля</a:t>
             </a:r>
           </a:p>
         </p:txBody>
@@ -3472,23 +3478,25 @@
           <a:lstStyle/>
           <a:p>
             <a:r>
-              <a:t>Ключевой показатель 12</a:t>
-            </a:r>
-          </a:p>
-          <a:p>
-            <a:pPr lvl="1">
-              <a:defRPr sz="1800"/>
-            </a:pPr>
-            <a:r>
-              <a:t>Пояснение 12.1</a:t>
-            </a:r>
-          </a:p>
-          <a:p>
-            <a:pPr lvl="1">
-              <a:defRPr sz="1800"/>
-            </a:pPr>
-            <a:r>
-              <a:t>Пояснение 12.2</a:t>
+              <a:t>Услуги — 54%</a:t>
+            </a:r>
+          </a:p>
+          <a:p>
+            <a:pPr lvl="1"/>
+            <a:r>
+              <a:t>Поставка — 31%</a:t>
+            </a:r>
+          </a:p>
+          <a:p>
+            <a:pPr lvl="1"/>
+            <a:r>
+              <a:t>Аренда — 15%</a:t>
+            </a:r>
+          </a:p>
+          <a:p>
+            <a:pPr lvl="1"/>
+            <a:r>
+              <a:t>Раздел 13: показатель за период — 1681 условных единиц</a:t>
             </a:r>
           </a:p>
         </p:txBody>
@@ -3527,7 +3535,7 @@
           <a:lstStyle/>
           <a:p>
             <a:r>
-              <a:t>Раздел 13</a:t>
+              <a:t>Слайд 14. Ключевые контрагенты</a:t>
             </a:r>
           </a:p>
         </p:txBody>
@@ -3548,23 +3556,25 @@
           <a:lstStyle/>
           <a:p>
             <a:r>
-              <a:t>Ключевой показатель 13</a:t>
-            </a:r>
-          </a:p>
-          <a:p>
-            <a:pPr lvl="1">
-              <a:defRPr sz="1800"/>
-            </a:pPr>
-            <a:r>
-              <a:t>Пояснение 13.1</a:t>
-            </a:r>
-          </a:p>
-          <a:p>
-            <a:pPr lvl="1">
-              <a:defRPr sz="1800"/>
-            </a:pPr>
-            <a:r>
-              <a:t>Пояснение 13.2</a:t>
+              <a:t>ООО «Василёк»</a:t>
+            </a:r>
+          </a:p>
+          <a:p>
+            <a:pPr lvl="1"/>
+            <a:r>
+              <a:t>ЗАО «Тестовый Мост»</a:t>
+            </a:r>
+          </a:p>
+          <a:p>
+            <a:pPr lvl="1"/>
+            <a:r>
+              <a:t>ООО «ТехноСфера-Плюс»</a:t>
+            </a:r>
+          </a:p>
+          <a:p>
+            <a:pPr lvl="1"/>
+            <a:r>
+              <a:t>Раздел 14: показатель за период — 1718 условных единиц</a:t>
             </a:r>
           </a:p>
         </p:txBody>
@@ -3603,7 +3613,7 @@
           <a:lstStyle/>
           <a:p>
             <a:r>
-              <a:t>Раздел 14</a:t>
+              <a:t>Слайд 15. Просроченная задолженность</a:t>
             </a:r>
           </a:p>
         </p:txBody>
@@ -3624,23 +3634,25 @@
           <a:lstStyle/>
           <a:p>
             <a:r>
-              <a:t>Ключевой показатель 14</a:t>
-            </a:r>
-          </a:p>
-          <a:p>
-            <a:pPr lvl="1">
-              <a:defRPr sz="1800"/>
-            </a:pPr>
-            <a:r>
-              <a:t>Пояснение 14.1</a:t>
-            </a:r>
-          </a:p>
-          <a:p>
-            <a:pPr lvl="1">
-              <a:defRPr sz="1800"/>
-            </a:pPr>
-            <a:r>
-              <a:t>Пояснение 14.2</a:t>
+              <a:t>Всего 4 договора</a:t>
+            </a:r>
+          </a:p>
+          <a:p>
+            <a:pPr lvl="1"/>
+            <a:r>
+              <a:t>Средний срок просрочки — 11 дней</a:t>
+            </a:r>
+          </a:p>
+          <a:p>
+            <a:pPr lvl="1"/>
+            <a:r>
+              <a:t>Претензионная работа начата по 3 из 4</a:t>
+            </a:r>
+          </a:p>
+          <a:p>
+            <a:pPr lvl="1"/>
+            <a:r>
+              <a:t>Раздел 15: показатель за период — 1755 условных единиц</a:t>
             </a:r>
           </a:p>
         </p:txBody>
@@ -3679,7 +3691,7 @@
           <a:lstStyle/>
           <a:p>
             <a:r>
-              <a:t>Раздел 15</a:t>
+              <a:t>Слайд 16. Процесс согласования</a:t>
             </a:r>
           </a:p>
         </p:txBody>
@@ -3700,23 +3712,31 @@
           <a:lstStyle/>
           <a:p>
             <a:r>
-              <a:t>Ключевой показатель 15</a:t>
-            </a:r>
-          </a:p>
-          <a:p>
-            <a:pPr lvl="1">
-              <a:defRPr sz="1800"/>
-            </a:pPr>
-            <a:r>
-              <a:t>Пояснение 15.1</a:t>
-            </a:r>
-          </a:p>
-          <a:p>
-            <a:pPr lvl="1">
-              <a:defRPr sz="1800"/>
-            </a:pPr>
-            <a:r>
-              <a:t>Пояснение 15.2</a:t>
+              <a:t>Заявка</a:t>
+            </a:r>
+          </a:p>
+          <a:p>
+            <a:pPr lvl="1"/>
+            <a:r>
+              <a:t>Проверка контрагента</a:t>
+            </a:r>
+          </a:p>
+          <a:p>
+            <a:pPr lvl="1"/>
+            <a:r>
+              <a:t>Юридическая экспертиза</a:t>
+            </a:r>
+          </a:p>
+          <a:p>
+            <a:pPr lvl="1"/>
+            <a:r>
+              <a:t>Подписание</a:t>
+            </a:r>
+          </a:p>
+          <a:p>
+            <a:pPr lvl="1"/>
+            <a:r>
+              <a:t>Раздел 16: показатель за период — 1792 условных единиц</a:t>
             </a:r>
           </a:p>
         </p:txBody>
@@ -3755,7 +3775,7 @@
           <a:lstStyle/>
           <a:p>
             <a:r>
-              <a:t>Раздел 16</a:t>
+              <a:t>Слайд 17. Риски</a:t>
             </a:r>
           </a:p>
         </p:txBody>
@@ -3776,23 +3796,25 @@
           <a:lstStyle/>
           <a:p>
             <a:r>
-              <a:t>Ключевой показатель 16</a:t>
-            </a:r>
-          </a:p>
-          <a:p>
-            <a:pPr lvl="1">
-              <a:defRPr sz="1800"/>
-            </a:pPr>
-            <a:r>
-              <a:t>Пояснение 16.1</a:t>
-            </a:r>
-          </a:p>
-          <a:p>
-            <a:pPr lvl="1">
-              <a:defRPr sz="1800"/>
-            </a:pPr>
-            <a:r>
-              <a:t>Пояснение 16.2</a:t>
+              <a:t>Зависимость от одного поставщика</a:t>
+            </a:r>
+          </a:p>
+          <a:p>
+            <a:pPr lvl="1"/>
+            <a:r>
+              <a:t>Валютные колебания</a:t>
+            </a:r>
+          </a:p>
+          <a:p>
+            <a:pPr lvl="1"/>
+            <a:r>
+              <a:t>Сроки поставки оборудования</a:t>
+            </a:r>
+          </a:p>
+          <a:p>
+            <a:pPr lvl="1"/>
+            <a:r>
+              <a:t>Раздел 17: показатель за период — 1829 условных единиц</a:t>
             </a:r>
           </a:p>
         </p:txBody>
@@ -3831,7 +3853,7 @@
           <a:lstStyle/>
           <a:p>
             <a:r>
-              <a:t>Раздел 17</a:t>
+              <a:t>Слайд 18. План на следующий квартал</a:t>
             </a:r>
           </a:p>
         </p:txBody>
@@ -3852,23 +3874,25 @@
           <a:lstStyle/>
           <a:p>
             <a:r>
-              <a:t>Ключевой показатель 17</a:t>
-            </a:r>
-          </a:p>
-          <a:p>
-            <a:pPr lvl="1">
-              <a:defRPr sz="1800"/>
-            </a:pPr>
-            <a:r>
-              <a:t>Пояснение 17.1</a:t>
-            </a:r>
-          </a:p>
-          <a:p>
-            <a:pPr lvl="1">
-              <a:defRPr sz="1800"/>
-            </a:pPr>
-            <a:r>
-              <a:t>Пояснение 17.2</a:t>
+              <a:t>Перевести 60% договоров в электронный вид</a:t>
+            </a:r>
+          </a:p>
+          <a:p>
+            <a:pPr lvl="1"/>
+            <a:r>
+              <a:t>Сократить срок согласования до 4 дней</a:t>
+            </a:r>
+          </a:p>
+          <a:p>
+            <a:pPr lvl="1"/>
+            <a:r>
+              <a:t>Запустить реестр в общем доступе</a:t>
+            </a:r>
+          </a:p>
+          <a:p>
+            <a:pPr lvl="1"/>
+            <a:r>
+              <a:t>Раздел 18: показатель за период — 1866 условных единиц</a:t>
             </a:r>
           </a:p>
         </p:txBody>
@@ -3907,7 +3931,7 @@
           <a:lstStyle/>
           <a:p>
             <a:r>
-              <a:t>Раздел 18</a:t>
+              <a:t>Слайд 19. Бюджет проекта</a:t>
             </a:r>
           </a:p>
         </p:txBody>
@@ -3928,23 +3952,25 @@
           <a:lstStyle/>
           <a:p>
             <a:r>
-              <a:t>Ключевой показатель 18</a:t>
-            </a:r>
-          </a:p>
-          <a:p>
-            <a:pPr lvl="1">
-              <a:defRPr sz="1800"/>
-            </a:pPr>
-            <a:r>
-              <a:t>Пояснение 18.1</a:t>
-            </a:r>
-          </a:p>
-          <a:p>
-            <a:pPr lvl="1">
-              <a:defRPr sz="1800"/>
-            </a:pPr>
-            <a:r>
-              <a:t>Пояснение 18.2</a:t>
+              <a:t>Расходы на лицензии — 18 400 BYN</a:t>
+            </a:r>
+          </a:p>
+          <a:p>
+            <a:pPr lvl="1"/>
+            <a:r>
+              <a:t>Обучение — 6 200 BYN</a:t>
+            </a:r>
+          </a:p>
+          <a:p>
+            <a:pPr lvl="1"/>
+            <a:r>
+              <a:t>Резерв — 5 000 BYN</a:t>
+            </a:r>
+          </a:p>
+          <a:p>
+            <a:pPr lvl="1"/>
+            <a:r>
+              <a:t>Раздел 19: показатель за период — 1903 условных единиц</a:t>
             </a:r>
           </a:p>
         </p:txBody>
@@ -3983,7 +4009,7 @@
           <a:lstStyle/>
           <a:p>
             <a:r>
-              <a:t>Раздел 1</a:t>
+              <a:t>Слайд 02. Итоги квартала</a:t>
             </a:r>
           </a:p>
         </p:txBody>
@@ -4004,23 +4030,25 @@
           <a:lstStyle/>
           <a:p>
             <a:r>
-              <a:t>Ключевой показатель 1</a:t>
-            </a:r>
-          </a:p>
-          <a:p>
-            <a:pPr lvl="1">
-              <a:defRPr sz="1800"/>
-            </a:pPr>
-            <a:r>
-              <a:t>Пояснение 1.1</a:t>
-            </a:r>
-          </a:p>
-          <a:p>
-            <a:pPr lvl="1">
-              <a:defRPr sz="1800"/>
-            </a:pPr>
-            <a:r>
-              <a:t>Пояснение 1.2</a:t>
+              <a:t>Выручка выросла на 12% к предыдущему кварталу</a:t>
+            </a:r>
+          </a:p>
+          <a:p>
+            <a:pPr lvl="1"/>
+            <a:r>
+              <a:t>Подписано 8 новых договоров</a:t>
+            </a:r>
+          </a:p>
+          <a:p>
+            <a:pPr lvl="1"/>
+            <a:r>
+              <a:t>Средний срок согласования — 6 рабочих дней</a:t>
+            </a:r>
+          </a:p>
+          <a:p>
+            <a:pPr lvl="1"/>
+            <a:r>
+              <a:t>Раздел 02: показатель за период — 1274 условных единиц</a:t>
             </a:r>
           </a:p>
         </p:txBody>
@@ -4059,7 +4087,7 @@
           <a:lstStyle/>
           <a:p>
             <a:r>
-              <a:t>Раздел 19</a:t>
+              <a:t>Слайд 20. Команда</a:t>
             </a:r>
           </a:p>
         </p:txBody>
@@ -4080,23 +4108,25 @@
           <a:lstStyle/>
           <a:p>
             <a:r>
-              <a:t>Ключевой показатель 19</a:t>
-            </a:r>
-          </a:p>
-          <a:p>
-            <a:pPr lvl="1">
-              <a:defRPr sz="1800"/>
-            </a:pPr>
-            <a:r>
-              <a:t>Пояснение 19.1</a:t>
-            </a:r>
-          </a:p>
-          <a:p>
-            <a:pPr lvl="1">
-              <a:defRPr sz="1800"/>
-            </a:pPr>
-            <a:r>
-              <a:t>Пояснение 19.2</a:t>
+              <a:t>Руководитель проекта — П. П. Петров</a:t>
+            </a:r>
+          </a:p>
+          <a:p>
+            <a:pPr lvl="1"/>
+            <a:r>
+              <a:t>Аналитик — А. В. Кузнецова</a:t>
+            </a:r>
+          </a:p>
+          <a:p>
+            <a:pPr lvl="1"/>
+            <a:r>
+              <a:t>Юрист — С. С. Сидоров</a:t>
+            </a:r>
+          </a:p>
+          <a:p>
+            <a:pPr lvl="1"/>
+            <a:r>
+              <a:t>Раздел 20: показатель за период — 1940 условных единиц</a:t>
             </a:r>
           </a:p>
         </p:txBody>
@@ -4135,7 +4165,7 @@
           <a:lstStyle/>
           <a:p>
             <a:r>
-              <a:t>Раздел 20</a:t>
+              <a:t>Слайд 21. Метрики (KPI)</a:t>
             </a:r>
           </a:p>
         </p:txBody>
@@ -4156,23 +4186,25 @@
           <a:lstStyle/>
           <a:p>
             <a:r>
-              <a:t>Ключевой показатель 20</a:t>
-            </a:r>
-          </a:p>
-          <a:p>
-            <a:pPr lvl="1">
-              <a:defRPr sz="1800"/>
-            </a:pPr>
-            <a:r>
-              <a:t>Пояснение 20.1</a:t>
-            </a:r>
-          </a:p>
-          <a:p>
-            <a:pPr lvl="1">
-              <a:defRPr sz="1800"/>
-            </a:pPr>
-            <a:r>
-              <a:t>Пояснение 20.2</a:t>
+              <a:t>Time to sign — 6 дней</a:t>
+            </a:r>
+          </a:p>
+          <a:p>
+            <a:pPr lvl="1"/>
+            <a:r>
+              <a:t>Contract coverage — 92%</a:t>
+            </a:r>
+          </a:p>
+          <a:p>
+            <a:pPr lvl="1"/>
+            <a:r>
+              <a:t>Renewal rate — 78%</a:t>
+            </a:r>
+          </a:p>
+          <a:p>
+            <a:pPr lvl="1"/>
+            <a:r>
+              <a:t>Раздел 21: показатель за период — 1977 условных единиц</a:t>
             </a:r>
           </a:p>
         </p:txBody>
@@ -4211,7 +4243,7 @@
           <a:lstStyle/>
           <a:p>
             <a:r>
-              <a:t>Раздел 21</a:t>
+              <a:t>Слайд 22. Итоги квартала</a:t>
             </a:r>
           </a:p>
         </p:txBody>
@@ -4232,23 +4264,25 @@
           <a:lstStyle/>
           <a:p>
             <a:r>
-              <a:t>Ключевой показатель 21</a:t>
-            </a:r>
-          </a:p>
-          <a:p>
-            <a:pPr lvl="1">
-              <a:defRPr sz="1800"/>
-            </a:pPr>
-            <a:r>
-              <a:t>Пояснение 21.1</a:t>
-            </a:r>
-          </a:p>
-          <a:p>
-            <a:pPr lvl="1">
-              <a:defRPr sz="1800"/>
-            </a:pPr>
-            <a:r>
-              <a:t>Пояснение 21.2</a:t>
+              <a:t>Выручка выросла на 12% к предыдущему кварталу</a:t>
+            </a:r>
+          </a:p>
+          <a:p>
+            <a:pPr lvl="1"/>
+            <a:r>
+              <a:t>Подписано 8 новых договоров</a:t>
+            </a:r>
+          </a:p>
+          <a:p>
+            <a:pPr lvl="1"/>
+            <a:r>
+              <a:t>Средний срок согласования — 6 рабочих дней</a:t>
+            </a:r>
+          </a:p>
+          <a:p>
+            <a:pPr lvl="1"/>
+            <a:r>
+              <a:t>Раздел 22: показатель за период — 2014 условных единиц</a:t>
             </a:r>
           </a:p>
         </p:txBody>
@@ -4287,7 +4321,7 @@
           <a:lstStyle/>
           <a:p>
             <a:r>
-              <a:t>Раздел 22</a:t>
+              <a:t>Слайд 23. Структура портфеля</a:t>
             </a:r>
           </a:p>
         </p:txBody>
@@ -4308,23 +4342,25 @@
           <a:lstStyle/>
           <a:p>
             <a:r>
-              <a:t>Ключевой показатель 22</a:t>
-            </a:r>
-          </a:p>
-          <a:p>
-            <a:pPr lvl="1">
-              <a:defRPr sz="1800"/>
-            </a:pPr>
-            <a:r>
-              <a:t>Пояснение 22.1</a:t>
-            </a:r>
-          </a:p>
-          <a:p>
-            <a:pPr lvl="1">
-              <a:defRPr sz="1800"/>
-            </a:pPr>
-            <a:r>
-              <a:t>Пояснение 22.2</a:t>
+              <a:t>Услуги — 54%</a:t>
+            </a:r>
+          </a:p>
+          <a:p>
+            <a:pPr lvl="1"/>
+            <a:r>
+              <a:t>Поставка — 31%</a:t>
+            </a:r>
+          </a:p>
+          <a:p>
+            <a:pPr lvl="1"/>
+            <a:r>
+              <a:t>Аренда — 15%</a:t>
+            </a:r>
+          </a:p>
+          <a:p>
+            <a:pPr lvl="1"/>
+            <a:r>
+              <a:t>Раздел 23: показатель за период — 2051 условных единиц</a:t>
             </a:r>
           </a:p>
         </p:txBody>
@@ -4363,7 +4399,7 @@
           <a:lstStyle/>
           <a:p>
             <a:r>
-              <a:t>Раздел 23</a:t>
+              <a:t>Слайд 24. Ключевые контрагенты</a:t>
             </a:r>
           </a:p>
         </p:txBody>
@@ -4384,23 +4420,25 @@
           <a:lstStyle/>
           <a:p>
             <a:r>
-              <a:t>Ключевой показатель 23</a:t>
-            </a:r>
-          </a:p>
-          <a:p>
-            <a:pPr lvl="1">
-              <a:defRPr sz="1800"/>
-            </a:pPr>
-            <a:r>
-              <a:t>Пояснение 23.1</a:t>
-            </a:r>
-          </a:p>
-          <a:p>
-            <a:pPr lvl="1">
-              <a:defRPr sz="1800"/>
-            </a:pPr>
-            <a:r>
-              <a:t>Пояснение 23.2</a:t>
+              <a:t>ООО «Василёк»</a:t>
+            </a:r>
+          </a:p>
+          <a:p>
+            <a:pPr lvl="1"/>
+            <a:r>
+              <a:t>ЗАО «Тестовый Мост»</a:t>
+            </a:r>
+          </a:p>
+          <a:p>
+            <a:pPr lvl="1"/>
+            <a:r>
+              <a:t>ООО «ТехноСфера-Плюс»</a:t>
+            </a:r>
+          </a:p>
+          <a:p>
+            <a:pPr lvl="1"/>
+            <a:r>
+              <a:t>Раздел 24: показатель за период — 2088 условных единиц</a:t>
             </a:r>
           </a:p>
         </p:txBody>
@@ -4439,7 +4477,7 @@
           <a:lstStyle/>
           <a:p>
             <a:r>
-              <a:t>Раздел 24</a:t>
+              <a:t>Слайд 25. Просроченная задолженность</a:t>
             </a:r>
           </a:p>
         </p:txBody>
@@ -4460,23 +4498,25 @@
           <a:lstStyle/>
           <a:p>
             <a:r>
-              <a:t>Ключевой показатель 24</a:t>
-            </a:r>
-          </a:p>
-          <a:p>
-            <a:pPr lvl="1">
-              <a:defRPr sz="1800"/>
-            </a:pPr>
-            <a:r>
-              <a:t>Пояснение 24.1</a:t>
-            </a:r>
-          </a:p>
-          <a:p>
-            <a:pPr lvl="1">
-              <a:defRPr sz="1800"/>
-            </a:pPr>
-            <a:r>
-              <a:t>Пояснение 24.2</a:t>
+              <a:t>Всего 4 договора</a:t>
+            </a:r>
+          </a:p>
+          <a:p>
+            <a:pPr lvl="1"/>
+            <a:r>
+              <a:t>Средний срок просрочки — 11 дней</a:t>
+            </a:r>
+          </a:p>
+          <a:p>
+            <a:pPr lvl="1"/>
+            <a:r>
+              <a:t>Претензионная работа начата по 3 из 4</a:t>
+            </a:r>
+          </a:p>
+          <a:p>
+            <a:pPr lvl="1"/>
+            <a:r>
+              <a:t>Раздел 25: показатель за период — 2125 условных единиц</a:t>
             </a:r>
           </a:p>
         </p:txBody>
@@ -4515,7 +4555,7 @@
           <a:lstStyle/>
           <a:p>
             <a:r>
-              <a:t>Раздел 25</a:t>
+              <a:t>Слайд 26. Процесс согласования</a:t>
             </a:r>
           </a:p>
         </p:txBody>
@@ -4536,23 +4576,31 @@
           <a:lstStyle/>
           <a:p>
             <a:r>
-              <a:t>Ключевой показатель 25</a:t>
-            </a:r>
-          </a:p>
-          <a:p>
-            <a:pPr lvl="1">
-              <a:defRPr sz="1800"/>
-            </a:pPr>
-            <a:r>
-              <a:t>Пояснение 25.1</a:t>
-            </a:r>
-          </a:p>
-          <a:p>
-            <a:pPr lvl="1">
-              <a:defRPr sz="1800"/>
-            </a:pPr>
-            <a:r>
-              <a:t>Пояснение 25.2</a:t>
+              <a:t>Заявка</a:t>
+            </a:r>
+          </a:p>
+          <a:p>
+            <a:pPr lvl="1"/>
+            <a:r>
+              <a:t>Проверка контрагента</a:t>
+            </a:r>
+          </a:p>
+          <a:p>
+            <a:pPr lvl="1"/>
+            <a:r>
+              <a:t>Юридическая экспертиза</a:t>
+            </a:r>
+          </a:p>
+          <a:p>
+            <a:pPr lvl="1"/>
+            <a:r>
+              <a:t>Подписание</a:t>
+            </a:r>
+          </a:p>
+          <a:p>
+            <a:pPr lvl="1"/>
+            <a:r>
+              <a:t>Раздел 26: показатель за период — 2162 условных единиц</a:t>
             </a:r>
           </a:p>
         </p:txBody>
@@ -4591,7 +4639,7 @@
           <a:lstStyle/>
           <a:p>
             <a:r>
-              <a:t>Раздел 26</a:t>
+              <a:t>Слайд 27. Риски</a:t>
             </a:r>
           </a:p>
         </p:txBody>
@@ -4612,23 +4660,25 @@
           <a:lstStyle/>
           <a:p>
             <a:r>
-              <a:t>Ключевой показатель 26</a:t>
-            </a:r>
-          </a:p>
-          <a:p>
-            <a:pPr lvl="1">
-              <a:defRPr sz="1800"/>
-            </a:pPr>
-            <a:r>
-              <a:t>Пояснение 26.1</a:t>
-            </a:r>
-          </a:p>
-          <a:p>
-            <a:pPr lvl="1">
-              <a:defRPr sz="1800"/>
-            </a:pPr>
-            <a:r>
-              <a:t>Пояснение 26.2</a:t>
+              <a:t>Зависимость от одного поставщика</a:t>
+            </a:r>
+          </a:p>
+          <a:p>
+            <a:pPr lvl="1"/>
+            <a:r>
+              <a:t>Валютные колебания</a:t>
+            </a:r>
+          </a:p>
+          <a:p>
+            <a:pPr lvl="1"/>
+            <a:r>
+              <a:t>Сроки поставки оборудования</a:t>
+            </a:r>
+          </a:p>
+          <a:p>
+            <a:pPr lvl="1"/>
+            <a:r>
+              <a:t>Раздел 27: показатель за период — 2199 условных единиц</a:t>
             </a:r>
           </a:p>
         </p:txBody>
@@ -4667,7 +4717,7 @@
           <a:lstStyle/>
           <a:p>
             <a:r>
-              <a:t>Раздел 27</a:t>
+              <a:t>Слайд 28. План на следующий квартал</a:t>
             </a:r>
           </a:p>
         </p:txBody>
@@ -4688,23 +4738,25 @@
           <a:lstStyle/>
           <a:p>
             <a:r>
-              <a:t>Ключевой показатель 27</a:t>
-            </a:r>
-          </a:p>
-          <a:p>
-            <a:pPr lvl="1">
-              <a:defRPr sz="1800"/>
-            </a:pPr>
-            <a:r>
-              <a:t>Пояснение 27.1</a:t>
-            </a:r>
-          </a:p>
-          <a:p>
-            <a:pPr lvl="1">
-              <a:defRPr sz="1800"/>
-            </a:pPr>
-            <a:r>
-              <a:t>Пояснение 27.2</a:t>
+              <a:t>Перевести 60% договоров в электронный вид</a:t>
+            </a:r>
+          </a:p>
+          <a:p>
+            <a:pPr lvl="1"/>
+            <a:r>
+              <a:t>Сократить срок согласования до 4 дней</a:t>
+            </a:r>
+          </a:p>
+          <a:p>
+            <a:pPr lvl="1"/>
+            <a:r>
+              <a:t>Запустить реестр в общем доступе</a:t>
+            </a:r>
+          </a:p>
+          <a:p>
+            <a:pPr lvl="1"/>
+            <a:r>
+              <a:t>Раздел 28: показатель за период — 2236 условных единиц</a:t>
             </a:r>
           </a:p>
         </p:txBody>
@@ -4743,7 +4795,7 @@
           <a:lstStyle/>
           <a:p>
             <a:r>
-              <a:t>Раздел 28</a:t>
+              <a:t>Слайд 29. Бюджет проекта</a:t>
             </a:r>
           </a:p>
         </p:txBody>
@@ -4764,23 +4816,25 @@
           <a:lstStyle/>
           <a:p>
             <a:r>
-              <a:t>Ключевой показатель 28</a:t>
-            </a:r>
-          </a:p>
-          <a:p>
-            <a:pPr lvl="1">
-              <a:defRPr sz="1800"/>
-            </a:pPr>
-            <a:r>
-              <a:t>Пояснение 28.1</a:t>
-            </a:r>
-          </a:p>
-          <a:p>
-            <a:pPr lvl="1">
-              <a:defRPr sz="1800"/>
-            </a:pPr>
-            <a:r>
-              <a:t>Пояснение 28.2</a:t>
+              <a:t>Расходы на лицензии — 18 400 BYN</a:t>
+            </a:r>
+          </a:p>
+          <a:p>
+            <a:pPr lvl="1"/>
+            <a:r>
+              <a:t>Обучение — 6 200 BYN</a:t>
+            </a:r>
+          </a:p>
+          <a:p>
+            <a:pPr lvl="1"/>
+            <a:r>
+              <a:t>Резерв — 5 000 BYN</a:t>
+            </a:r>
+          </a:p>
+          <a:p>
+            <a:pPr lvl="1"/>
+            <a:r>
+              <a:t>Раздел 29: показатель за период — 2273 условных единиц</a:t>
             </a:r>
           </a:p>
         </p:txBody>
@@ -4819,7 +4873,7 @@
           <a:lstStyle/>
           <a:p>
             <a:r>
-              <a:t>Раздел 2</a:t>
+              <a:t>Слайд 03. Структура портфеля</a:t>
             </a:r>
           </a:p>
         </p:txBody>
@@ -4840,23 +4894,25 @@
           <a:lstStyle/>
           <a:p>
             <a:r>
-              <a:t>Ключевой показатель 2</a:t>
-            </a:r>
-          </a:p>
-          <a:p>
-            <a:pPr lvl="1">
-              <a:defRPr sz="1800"/>
-            </a:pPr>
-            <a:r>
-              <a:t>Пояснение 2.1</a:t>
-            </a:r>
-          </a:p>
-          <a:p>
-            <a:pPr lvl="1">
-              <a:defRPr sz="1800"/>
-            </a:pPr>
-            <a:r>
-              <a:t>Пояснение 2.2</a:t>
+              <a:t>Услуги — 54%</a:t>
+            </a:r>
+          </a:p>
+          <a:p>
+            <a:pPr lvl="1"/>
+            <a:r>
+              <a:t>Поставка — 31%</a:t>
+            </a:r>
+          </a:p>
+          <a:p>
+            <a:pPr lvl="1"/>
+            <a:r>
+              <a:t>Аренда — 15%</a:t>
+            </a:r>
+          </a:p>
+          <a:p>
+            <a:pPr lvl="1"/>
+            <a:r>
+              <a:t>Раздел 03: показатель за период — 1311 условных единиц</a:t>
             </a:r>
           </a:p>
         </p:txBody>
@@ -4895,7 +4951,7 @@
           <a:lstStyle/>
           <a:p>
             <a:r>
-              <a:t>Раздел 29</a:t>
+              <a:t>Слайд 30. Команда</a:t>
             </a:r>
           </a:p>
         </p:txBody>
@@ -4916,23 +4972,25 @@
           <a:lstStyle/>
           <a:p>
             <a:r>
-              <a:t>Ключевой показатель 29</a:t>
-            </a:r>
-          </a:p>
-          <a:p>
-            <a:pPr lvl="1">
-              <a:defRPr sz="1800"/>
-            </a:pPr>
-            <a:r>
-              <a:t>Пояснение 29.1</a:t>
-            </a:r>
-          </a:p>
-          <a:p>
-            <a:pPr lvl="1">
-              <a:defRPr sz="1800"/>
-            </a:pPr>
-            <a:r>
-              <a:t>Пояснение 29.2</a:t>
+              <a:t>Руководитель проекта — П. П. Петров</a:t>
+            </a:r>
+          </a:p>
+          <a:p>
+            <a:pPr lvl="1"/>
+            <a:r>
+              <a:t>Аналитик — А. В. Кузнецова</a:t>
+            </a:r>
+          </a:p>
+          <a:p>
+            <a:pPr lvl="1"/>
+            <a:r>
+              <a:t>Юрист — С. С. Сидоров</a:t>
+            </a:r>
+          </a:p>
+          <a:p>
+            <a:pPr lvl="1"/>
+            <a:r>
+              <a:t>Раздел 30: показатель за период — 2310 условных единиц</a:t>
             </a:r>
           </a:p>
         </p:txBody>
@@ -4971,7 +5029,7 @@
           <a:lstStyle/>
           <a:p>
             <a:r>
-              <a:t>Раздел 30</a:t>
+              <a:t>Слайд 31. Метрики (KPI)</a:t>
             </a:r>
           </a:p>
         </p:txBody>
@@ -4992,23 +5050,25 @@
           <a:lstStyle/>
           <a:p>
             <a:r>
-              <a:t>Ключевой показатель 30</a:t>
-            </a:r>
-          </a:p>
-          <a:p>
-            <a:pPr lvl="1">
-              <a:defRPr sz="1800"/>
-            </a:pPr>
-            <a:r>
-              <a:t>Пояснение 30.1</a:t>
-            </a:r>
-          </a:p>
-          <a:p>
-            <a:pPr lvl="1">
-              <a:defRPr sz="1800"/>
-            </a:pPr>
-            <a:r>
-              <a:t>Пояснение 30.2</a:t>
+              <a:t>Time to sign — 6 дней</a:t>
+            </a:r>
+          </a:p>
+          <a:p>
+            <a:pPr lvl="1"/>
+            <a:r>
+              <a:t>Contract coverage — 92%</a:t>
+            </a:r>
+          </a:p>
+          <a:p>
+            <a:pPr lvl="1"/>
+            <a:r>
+              <a:t>Renewal rate — 78%</a:t>
+            </a:r>
+          </a:p>
+          <a:p>
+            <a:pPr lvl="1"/>
+            <a:r>
+              <a:t>Раздел 31: показатель за период — 2347 условных единиц</a:t>
             </a:r>
           </a:p>
         </p:txBody>
@@ -5047,7 +5107,7 @@
           <a:lstStyle/>
           <a:p>
             <a:r>
-              <a:t>Раздел 31</a:t>
+              <a:t>Слайд 32. Итоги квартала</a:t>
             </a:r>
           </a:p>
         </p:txBody>
@@ -5068,23 +5128,25 @@
           <a:lstStyle/>
           <a:p>
             <a:r>
-              <a:t>Ключевой показатель 31</a:t>
-            </a:r>
-          </a:p>
-          <a:p>
-            <a:pPr lvl="1">
-              <a:defRPr sz="1800"/>
-            </a:pPr>
-            <a:r>
-              <a:t>Пояснение 31.1</a:t>
-            </a:r>
-          </a:p>
-          <a:p>
-            <a:pPr lvl="1">
-              <a:defRPr sz="1800"/>
-            </a:pPr>
-            <a:r>
-              <a:t>Пояснение 31.2</a:t>
+              <a:t>Выручка выросла на 12% к предыдущему кварталу</a:t>
+            </a:r>
+          </a:p>
+          <a:p>
+            <a:pPr lvl="1"/>
+            <a:r>
+              <a:t>Подписано 8 новых договоров</a:t>
+            </a:r>
+          </a:p>
+          <a:p>
+            <a:pPr lvl="1"/>
+            <a:r>
+              <a:t>Средний срок согласования — 6 рабочих дней</a:t>
+            </a:r>
+          </a:p>
+          <a:p>
+            <a:pPr lvl="1"/>
+            <a:r>
+              <a:t>Раздел 32: показатель за период — 2384 условных единиц</a:t>
             </a:r>
           </a:p>
         </p:txBody>
@@ -5123,7 +5185,7 @@
           <a:lstStyle/>
           <a:p>
             <a:r>
-              <a:t>Раздел 32</a:t>
+              <a:t>Слайд 33. Структура портфеля</a:t>
             </a:r>
           </a:p>
         </p:txBody>
@@ -5144,23 +5206,25 @@
           <a:lstStyle/>
           <a:p>
             <a:r>
-              <a:t>Ключевой показатель 32</a:t>
-            </a:r>
-          </a:p>
-          <a:p>
-            <a:pPr lvl="1">
-              <a:defRPr sz="1800"/>
-            </a:pPr>
-            <a:r>
-              <a:t>Пояснение 32.1</a:t>
-            </a:r>
-          </a:p>
-          <a:p>
-            <a:pPr lvl="1">
-              <a:defRPr sz="1800"/>
-            </a:pPr>
-            <a:r>
-              <a:t>Пояснение 32.2</a:t>
+              <a:t>Услуги — 54%</a:t>
+            </a:r>
+          </a:p>
+          <a:p>
+            <a:pPr lvl="1"/>
+            <a:r>
+              <a:t>Поставка — 31%</a:t>
+            </a:r>
+          </a:p>
+          <a:p>
+            <a:pPr lvl="1"/>
+            <a:r>
+              <a:t>Аренда — 15%</a:t>
+            </a:r>
+          </a:p>
+          <a:p>
+            <a:pPr lvl="1"/>
+            <a:r>
+              <a:t>Раздел 33: показатель за период — 2421 условных единиц</a:t>
             </a:r>
           </a:p>
         </p:txBody>
@@ -5199,7 +5263,7 @@
           <a:lstStyle/>
           <a:p>
             <a:r>
-              <a:t>Раздел 33</a:t>
+              <a:t>Слайд 34. Ключевые контрагенты</a:t>
             </a:r>
           </a:p>
         </p:txBody>
@@ -5220,23 +5284,25 @@
           <a:lstStyle/>
           <a:p>
             <a:r>
-              <a:t>Ключевой показатель 33</a:t>
-            </a:r>
-          </a:p>
-          <a:p>
-            <a:pPr lvl="1">
-              <a:defRPr sz="1800"/>
-            </a:pPr>
-            <a:r>
-              <a:t>Пояснение 33.1</a:t>
-            </a:r>
-          </a:p>
-          <a:p>
-            <a:pPr lvl="1">
-              <a:defRPr sz="1800"/>
-            </a:pPr>
-            <a:r>
-              <a:t>Пояснение 33.2</a:t>
+              <a:t>ООО «Василёк»</a:t>
+            </a:r>
+          </a:p>
+          <a:p>
+            <a:pPr lvl="1"/>
+            <a:r>
+              <a:t>ЗАО «Тестовый Мост»</a:t>
+            </a:r>
+          </a:p>
+          <a:p>
+            <a:pPr lvl="1"/>
+            <a:r>
+              <a:t>ООО «ТехноСфера-Плюс»</a:t>
+            </a:r>
+          </a:p>
+          <a:p>
+            <a:pPr lvl="1"/>
+            <a:r>
+              <a:t>Раздел 34: показатель за период — 2458 условных единиц</a:t>
             </a:r>
           </a:p>
         </p:txBody>
@@ -5275,7 +5341,7 @@
           <a:lstStyle/>
           <a:p>
             <a:r>
-              <a:t>Раздел 34</a:t>
+              <a:t>Слайд 35. Просроченная задолженность</a:t>
             </a:r>
           </a:p>
         </p:txBody>
@@ -5296,23 +5362,25 @@
           <a:lstStyle/>
           <a:p>
             <a:r>
-              <a:t>Ключевой показатель 34</a:t>
-            </a:r>
-          </a:p>
-          <a:p>
-            <a:pPr lvl="1">
-              <a:defRPr sz="1800"/>
-            </a:pPr>
-            <a:r>
-              <a:t>Пояснение 34.1</a:t>
-            </a:r>
-          </a:p>
-          <a:p>
-            <a:pPr lvl="1">
-              <a:defRPr sz="1800"/>
-            </a:pPr>
-            <a:r>
-              <a:t>Пояснение 34.2</a:t>
+              <a:t>Всего 4 договора</a:t>
+            </a:r>
+          </a:p>
+          <a:p>
+            <a:pPr lvl="1"/>
+            <a:r>
+              <a:t>Средний срок просрочки — 11 дней</a:t>
+            </a:r>
+          </a:p>
+          <a:p>
+            <a:pPr lvl="1"/>
+            <a:r>
+              <a:t>Претензионная работа начата по 3 из 4</a:t>
+            </a:r>
+          </a:p>
+          <a:p>
+            <a:pPr lvl="1"/>
+            <a:r>
+              <a:t>Раздел 35: показатель за период — 2495 условных единиц</a:t>
             </a:r>
           </a:p>
         </p:txBody>
@@ -5351,7 +5419,7 @@
           <a:lstStyle/>
           <a:p>
             <a:r>
-              <a:t>Раздел 35</a:t>
+              <a:t>Слайд 36. Процесс согласования</a:t>
             </a:r>
           </a:p>
         </p:txBody>
@@ -5372,23 +5440,31 @@
           <a:lstStyle/>
           <a:p>
             <a:r>
-              <a:t>Ключевой показатель 35</a:t>
-            </a:r>
-          </a:p>
-          <a:p>
-            <a:pPr lvl="1">
-              <a:defRPr sz="1800"/>
-            </a:pPr>
-            <a:r>
-              <a:t>Пояснение 35.1</a:t>
-            </a:r>
-          </a:p>
-          <a:p>
-            <a:pPr lvl="1">
-              <a:defRPr sz="1800"/>
-            </a:pPr>
-            <a:r>
-              <a:t>Пояснение 35.2</a:t>
+              <a:t>Заявка</a:t>
+            </a:r>
+          </a:p>
+          <a:p>
+            <a:pPr lvl="1"/>
+            <a:r>
+              <a:t>Проверка контрагента</a:t>
+            </a:r>
+          </a:p>
+          <a:p>
+            <a:pPr lvl="1"/>
+            <a:r>
+              <a:t>Юридическая экспертиза</a:t>
+            </a:r>
+          </a:p>
+          <a:p>
+            <a:pPr lvl="1"/>
+            <a:r>
+              <a:t>Подписание</a:t>
+            </a:r>
+          </a:p>
+          <a:p>
+            <a:pPr lvl="1"/>
+            <a:r>
+              <a:t>Раздел 36: показатель за период — 2532 условных единиц</a:t>
             </a:r>
           </a:p>
         </p:txBody>
@@ -5427,7 +5503,7 @@
           <a:lstStyle/>
           <a:p>
             <a:r>
-              <a:t>Раздел 36</a:t>
+              <a:t>Слайд 37. Риски</a:t>
             </a:r>
           </a:p>
         </p:txBody>
@@ -5448,23 +5524,25 @@
           <a:lstStyle/>
           <a:p>
             <a:r>
-              <a:t>Ключевой показатель 36</a:t>
-            </a:r>
-          </a:p>
-          <a:p>
-            <a:pPr lvl="1">
-              <a:defRPr sz="1800"/>
-            </a:pPr>
-            <a:r>
-              <a:t>Пояснение 36.1</a:t>
-            </a:r>
-          </a:p>
-          <a:p>
-            <a:pPr lvl="1">
-              <a:defRPr sz="1800"/>
-            </a:pPr>
-            <a:r>
-              <a:t>Пояснение 36.2</a:t>
+              <a:t>Зависимость от одного поставщика</a:t>
+            </a:r>
+          </a:p>
+          <a:p>
+            <a:pPr lvl="1"/>
+            <a:r>
+              <a:t>Валютные колебания</a:t>
+            </a:r>
+          </a:p>
+          <a:p>
+            <a:pPr lvl="1"/>
+            <a:r>
+              <a:t>Сроки поставки оборудования</a:t>
+            </a:r>
+          </a:p>
+          <a:p>
+            <a:pPr lvl="1"/>
+            <a:r>
+              <a:t>Раздел 37: показатель за период — 2569 условных единиц</a:t>
             </a:r>
           </a:p>
         </p:txBody>
@@ -5503,7 +5581,7 @@
           <a:lstStyle/>
           <a:p>
             <a:r>
-              <a:t>Раздел 37</a:t>
+              <a:t>Слайд 38. План на следующий квартал</a:t>
             </a:r>
           </a:p>
         </p:txBody>
@@ -5524,23 +5602,25 @@
           <a:lstStyle/>
           <a:p>
             <a:r>
-              <a:t>Ключевой показатель 37</a:t>
-            </a:r>
-          </a:p>
-          <a:p>
-            <a:pPr lvl="1">
-              <a:defRPr sz="1800"/>
-            </a:pPr>
-            <a:r>
-              <a:t>Пояснение 37.1</a:t>
-            </a:r>
-          </a:p>
-          <a:p>
-            <a:pPr lvl="1">
-              <a:defRPr sz="1800"/>
-            </a:pPr>
-            <a:r>
-              <a:t>Пояснение 37.2</a:t>
+              <a:t>Перевести 60% договоров в электронный вид</a:t>
+            </a:r>
+          </a:p>
+          <a:p>
+            <a:pPr lvl="1"/>
+            <a:r>
+              <a:t>Сократить срок согласования до 4 дней</a:t>
+            </a:r>
+          </a:p>
+          <a:p>
+            <a:pPr lvl="1"/>
+            <a:r>
+              <a:t>Запустить реестр в общем доступе</a:t>
+            </a:r>
+          </a:p>
+          <a:p>
+            <a:pPr lvl="1"/>
+            <a:r>
+              <a:t>Раздел 38: показатель за период — 2606 условных единиц</a:t>
             </a:r>
           </a:p>
         </p:txBody>
@@ -5579,7 +5659,7 @@
           <a:lstStyle/>
           <a:p>
             <a:r>
-              <a:t>Раздел 38</a:t>
+              <a:t>Слайд 39. Бюджет проекта</a:t>
             </a:r>
           </a:p>
         </p:txBody>
@@ -5600,23 +5680,25 @@
           <a:lstStyle/>
           <a:p>
             <a:r>
-              <a:t>Ключевой показатель 38</a:t>
-            </a:r>
-          </a:p>
-          <a:p>
-            <a:pPr lvl="1">
-              <a:defRPr sz="1800"/>
-            </a:pPr>
-            <a:r>
-              <a:t>Пояснение 38.1</a:t>
-            </a:r>
-          </a:p>
-          <a:p>
-            <a:pPr lvl="1">
-              <a:defRPr sz="1800"/>
-            </a:pPr>
-            <a:r>
-              <a:t>Пояснение 38.2</a:t>
+              <a:t>Расходы на лицензии — 18 400 BYN</a:t>
+            </a:r>
+          </a:p>
+          <a:p>
+            <a:pPr lvl="1"/>
+            <a:r>
+              <a:t>Обучение — 6 200 BYN</a:t>
+            </a:r>
+          </a:p>
+          <a:p>
+            <a:pPr lvl="1"/>
+            <a:r>
+              <a:t>Резерв — 5 000 BYN</a:t>
+            </a:r>
+          </a:p>
+          <a:p>
+            <a:pPr lvl="1"/>
+            <a:r>
+              <a:t>Раздел 39: показатель за период — 2643 условных единиц</a:t>
             </a:r>
           </a:p>
         </p:txBody>
@@ -5655,7 +5737,7 @@
           <a:lstStyle/>
           <a:p>
             <a:r>
-              <a:t>Раздел 3</a:t>
+              <a:t>Слайд 04. Ключевые контрагенты</a:t>
             </a:r>
           </a:p>
         </p:txBody>
@@ -5676,23 +5758,25 @@
           <a:lstStyle/>
           <a:p>
             <a:r>
-              <a:t>Ключевой показатель 3</a:t>
-            </a:r>
-          </a:p>
-          <a:p>
-            <a:pPr lvl="1">
-              <a:defRPr sz="1800"/>
-            </a:pPr>
-            <a:r>
-              <a:t>Пояснение 3.1</a:t>
-            </a:r>
-          </a:p>
-          <a:p>
-            <a:pPr lvl="1">
-              <a:defRPr sz="1800"/>
-            </a:pPr>
-            <a:r>
-              <a:t>Пояснение 3.2</a:t>
+              <a:t>ООО «Василёк»</a:t>
+            </a:r>
+          </a:p>
+          <a:p>
+            <a:pPr lvl="1"/>
+            <a:r>
+              <a:t>ЗАО «Тестовый Мост»</a:t>
+            </a:r>
+          </a:p>
+          <a:p>
+            <a:pPr lvl="1"/>
+            <a:r>
+              <a:t>ООО «ТехноСфера-Плюс»</a:t>
+            </a:r>
+          </a:p>
+          <a:p>
+            <a:pPr lvl="1"/>
+            <a:r>
+              <a:t>Раздел 04: показатель за период — 1348 условных единиц</a:t>
             </a:r>
           </a:p>
         </p:txBody>
@@ -5731,7 +5815,7 @@
           <a:lstStyle/>
           <a:p>
             <a:r>
-              <a:t>Раздел 39</a:t>
+              <a:t>Слайд 40. Команда</a:t>
             </a:r>
           </a:p>
         </p:txBody>
@@ -5752,23 +5836,25 @@
           <a:lstStyle/>
           <a:p>
             <a:r>
-              <a:t>Ключевой показатель 39</a:t>
-            </a:r>
-          </a:p>
-          <a:p>
-            <a:pPr lvl="1">
-              <a:defRPr sz="1800"/>
-            </a:pPr>
-            <a:r>
-              <a:t>Пояснение 39.1</a:t>
-            </a:r>
-          </a:p>
-          <a:p>
-            <a:pPr lvl="1">
-              <a:defRPr sz="1800"/>
-            </a:pPr>
-            <a:r>
-              <a:t>Пояснение 39.2</a:t>
+              <a:t>Руководитель проекта — П. П. Петров</a:t>
+            </a:r>
+          </a:p>
+          <a:p>
+            <a:pPr lvl="1"/>
+            <a:r>
+              <a:t>Аналитик — А. В. Кузнецова</a:t>
+            </a:r>
+          </a:p>
+          <a:p>
+            <a:pPr lvl="1"/>
+            <a:r>
+              <a:t>Юрист — С. С. Сидоров</a:t>
+            </a:r>
+          </a:p>
+          <a:p>
+            <a:pPr lvl="1"/>
+            <a:r>
+              <a:t>Раздел 40: показатель за период — 2680 условных единиц</a:t>
             </a:r>
           </a:p>
         </p:txBody>
@@ -5807,7 +5893,7 @@
           <a:lstStyle/>
           <a:p>
             <a:r>
-              <a:t>Раздел 40</a:t>
+              <a:t>Слайд 41. Метрики (KPI)</a:t>
             </a:r>
           </a:p>
         </p:txBody>
@@ -5828,23 +5914,25 @@
           <a:lstStyle/>
           <a:p>
             <a:r>
-              <a:t>Ключевой показатель 40</a:t>
-            </a:r>
-          </a:p>
-          <a:p>
-            <a:pPr lvl="1">
-              <a:defRPr sz="1800"/>
-            </a:pPr>
-            <a:r>
-              <a:t>Пояснение 40.1</a:t>
-            </a:r>
-          </a:p>
-          <a:p>
-            <a:pPr lvl="1">
-              <a:defRPr sz="1800"/>
-            </a:pPr>
-            <a:r>
-              <a:t>Пояснение 40.2</a:t>
+              <a:t>Time to sign — 6 дней</a:t>
+            </a:r>
+          </a:p>
+          <a:p>
+            <a:pPr lvl="1"/>
+            <a:r>
+              <a:t>Contract coverage — 92%</a:t>
+            </a:r>
+          </a:p>
+          <a:p>
+            <a:pPr lvl="1"/>
+            <a:r>
+              <a:t>Renewal rate — 78%</a:t>
+            </a:r>
+          </a:p>
+          <a:p>
+            <a:pPr lvl="1"/>
+            <a:r>
+              <a:t>Раздел 41: показатель за период — 2717 условных единиц</a:t>
             </a:r>
           </a:p>
         </p:txBody>
@@ -5883,7 +5971,7 @@
           <a:lstStyle/>
           <a:p>
             <a:r>
-              <a:t>Раздел 41</a:t>
+              <a:t>Слайд 42. Итоги квартала</a:t>
             </a:r>
           </a:p>
         </p:txBody>
@@ -5904,23 +5992,25 @@
           <a:lstStyle/>
           <a:p>
             <a:r>
-              <a:t>Ключевой показатель 41</a:t>
-            </a:r>
-          </a:p>
-          <a:p>
-            <a:pPr lvl="1">
-              <a:defRPr sz="1800"/>
-            </a:pPr>
-            <a:r>
-              <a:t>Пояснение 41.1</a:t>
-            </a:r>
-          </a:p>
-          <a:p>
-            <a:pPr lvl="1">
-              <a:defRPr sz="1800"/>
-            </a:pPr>
-            <a:r>
-              <a:t>Пояснение 41.2</a:t>
+              <a:t>Выручка выросла на 12% к предыдущему кварталу</a:t>
+            </a:r>
+          </a:p>
+          <a:p>
+            <a:pPr lvl="1"/>
+            <a:r>
+              <a:t>Подписано 8 новых договоров</a:t>
+            </a:r>
+          </a:p>
+          <a:p>
+            <a:pPr lvl="1"/>
+            <a:r>
+              <a:t>Средний срок согласования — 6 рабочих дней</a:t>
+            </a:r>
+          </a:p>
+          <a:p>
+            <a:pPr lvl="1"/>
+            <a:r>
+              <a:t>Раздел 42: показатель за период — 2754 условных единиц</a:t>
             </a:r>
           </a:p>
         </p:txBody>
@@ -5959,7 +6049,7 @@
           <a:lstStyle/>
           <a:p>
             <a:r>
-              <a:t>Раздел 42</a:t>
+              <a:t>Слайд 43. Структура портфеля</a:t>
             </a:r>
           </a:p>
         </p:txBody>
@@ -5980,23 +6070,25 @@
           <a:lstStyle/>
           <a:p>
             <a:r>
-              <a:t>Ключевой показатель 42</a:t>
-            </a:r>
-          </a:p>
-          <a:p>
-            <a:pPr lvl="1">
-              <a:defRPr sz="1800"/>
-            </a:pPr>
-            <a:r>
-              <a:t>Пояснение 42.1</a:t>
-            </a:r>
-          </a:p>
-          <a:p>
-            <a:pPr lvl="1">
-              <a:defRPr sz="1800"/>
-            </a:pPr>
-            <a:r>
-              <a:t>Пояснение 42.2</a:t>
+              <a:t>Услуги — 54%</a:t>
+            </a:r>
+          </a:p>
+          <a:p>
+            <a:pPr lvl="1"/>
+            <a:r>
+              <a:t>Поставка — 31%</a:t>
+            </a:r>
+          </a:p>
+          <a:p>
+            <a:pPr lvl="1"/>
+            <a:r>
+              <a:t>Аренда — 15%</a:t>
+            </a:r>
+          </a:p>
+          <a:p>
+            <a:pPr lvl="1"/>
+            <a:r>
+              <a:t>Раздел 43: показатель за период — 2791 условных единиц</a:t>
             </a:r>
           </a:p>
         </p:txBody>
@@ -6035,7 +6127,7 @@
           <a:lstStyle/>
           <a:p>
             <a:r>
-              <a:t>Раздел 43</a:t>
+              <a:t>Слайд 44. Ключевые контрагенты</a:t>
             </a:r>
           </a:p>
         </p:txBody>
@@ -6056,23 +6148,25 @@
           <a:lstStyle/>
           <a:p>
             <a:r>
-              <a:t>Ключевой показатель 43</a:t>
-            </a:r>
-          </a:p>
-          <a:p>
-            <a:pPr lvl="1">
-              <a:defRPr sz="1800"/>
-            </a:pPr>
-            <a:r>
-              <a:t>Пояснение 43.1</a:t>
-            </a:r>
-          </a:p>
-          <a:p>
-            <a:pPr lvl="1">
-              <a:defRPr sz="1800"/>
-            </a:pPr>
-            <a:r>
-              <a:t>Пояснение 43.2</a:t>
+              <a:t>ООО «Василёк»</a:t>
+            </a:r>
+          </a:p>
+          <a:p>
+            <a:pPr lvl="1"/>
+            <a:r>
+              <a:t>ЗАО «Тестовый Мост»</a:t>
+            </a:r>
+          </a:p>
+          <a:p>
+            <a:pPr lvl="1"/>
+            <a:r>
+              <a:t>ООО «ТехноСфера-Плюс»</a:t>
+            </a:r>
+          </a:p>
+          <a:p>
+            <a:pPr lvl="1"/>
+            <a:r>
+              <a:t>Раздел 44: показатель за период — 2828 условных единиц</a:t>
             </a:r>
           </a:p>
         </p:txBody>
@@ -6111,7 +6205,7 @@
           <a:lstStyle/>
           <a:p>
             <a:r>
-              <a:t>Раздел 44</a:t>
+              <a:t>Слайд 45. Просроченная задолженность</a:t>
             </a:r>
           </a:p>
         </p:txBody>
@@ -6132,23 +6226,25 @@
           <a:lstStyle/>
           <a:p>
             <a:r>
-              <a:t>Ключевой показатель 44</a:t>
-            </a:r>
-          </a:p>
-          <a:p>
-            <a:pPr lvl="1">
-              <a:defRPr sz="1800"/>
-            </a:pPr>
-            <a:r>
-              <a:t>Пояснение 44.1</a:t>
-            </a:r>
-          </a:p>
-          <a:p>
-            <a:pPr lvl="1">
-              <a:defRPr sz="1800"/>
-            </a:pPr>
-            <a:r>
-              <a:t>Пояснение 44.2</a:t>
+              <a:t>Всего 4 договора</a:t>
+            </a:r>
+          </a:p>
+          <a:p>
+            <a:pPr lvl="1"/>
+            <a:r>
+              <a:t>Средний срок просрочки — 11 дней</a:t>
+            </a:r>
+          </a:p>
+          <a:p>
+            <a:pPr lvl="1"/>
+            <a:r>
+              <a:t>Претензионная работа начата по 3 из 4</a:t>
+            </a:r>
+          </a:p>
+          <a:p>
+            <a:pPr lvl="1"/>
+            <a:r>
+              <a:t>Раздел 45: показатель за период — 2865 условных единиц</a:t>
             </a:r>
           </a:p>
         </p:txBody>
@@ -6187,7 +6283,7 @@
           <a:lstStyle/>
           <a:p>
             <a:r>
-              <a:t>Раздел 45</a:t>
+              <a:t>Слайд 46. Процесс согласования</a:t>
             </a:r>
           </a:p>
         </p:txBody>
@@ -6208,23 +6304,31 @@
           <a:lstStyle/>
           <a:p>
             <a:r>
-              <a:t>Ключевой показатель 45</a:t>
-            </a:r>
-          </a:p>
-          <a:p>
-            <a:pPr lvl="1">
-              <a:defRPr sz="1800"/>
-            </a:pPr>
-            <a:r>
-              <a:t>Пояснение 45.1</a:t>
-            </a:r>
-          </a:p>
-          <a:p>
-            <a:pPr lvl="1">
-              <a:defRPr sz="1800"/>
-            </a:pPr>
-            <a:r>
-              <a:t>Пояснение 45.2</a:t>
+              <a:t>Заявка</a:t>
+            </a:r>
+          </a:p>
+          <a:p>
+            <a:pPr lvl="1"/>
+            <a:r>
+              <a:t>Проверка контрагента</a:t>
+            </a:r>
+          </a:p>
+          <a:p>
+            <a:pPr lvl="1"/>
+            <a:r>
+              <a:t>Юридическая экспертиза</a:t>
+            </a:r>
+          </a:p>
+          <a:p>
+            <a:pPr lvl="1"/>
+            <a:r>
+              <a:t>Подписание</a:t>
+            </a:r>
+          </a:p>
+          <a:p>
+            <a:pPr lvl="1"/>
+            <a:r>
+              <a:t>Раздел 46: показатель за период — 2902 условных единиц</a:t>
             </a:r>
           </a:p>
         </p:txBody>
@@ -6263,7 +6367,7 @@
           <a:lstStyle/>
           <a:p>
             <a:r>
-              <a:t>Раздел 46</a:t>
+              <a:t>Слайд 47. Риски</a:t>
             </a:r>
           </a:p>
         </p:txBody>
@@ -6284,23 +6388,25 @@
           <a:lstStyle/>
           <a:p>
             <a:r>
-              <a:t>Ключевой показатель 46</a:t>
-            </a:r>
-          </a:p>
-          <a:p>
-            <a:pPr lvl="1">
-              <a:defRPr sz="1800"/>
-            </a:pPr>
-            <a:r>
-              <a:t>Пояснение 46.1</a:t>
-            </a:r>
-          </a:p>
-          <a:p>
-            <a:pPr lvl="1">
-              <a:defRPr sz="1800"/>
-            </a:pPr>
-            <a:r>
-              <a:t>Пояснение 46.2</a:t>
+              <a:t>Зависимость от одного поставщика</a:t>
+            </a:r>
+          </a:p>
+          <a:p>
+            <a:pPr lvl="1"/>
+            <a:r>
+              <a:t>Валютные колебания</a:t>
+            </a:r>
+          </a:p>
+          <a:p>
+            <a:pPr lvl="1"/>
+            <a:r>
+              <a:t>Сроки поставки оборудования</a:t>
+            </a:r>
+          </a:p>
+          <a:p>
+            <a:pPr lvl="1"/>
+            <a:r>
+              <a:t>Раздел 47: показатель за период — 2939 условных единиц</a:t>
             </a:r>
           </a:p>
         </p:txBody>
@@ -6339,7 +6445,7 @@
           <a:lstStyle/>
           <a:p>
             <a:r>
-              <a:t>Раздел 47</a:t>
+              <a:t>Слайд 48. План на следующий квартал</a:t>
             </a:r>
           </a:p>
         </p:txBody>
@@ -6360,23 +6466,25 @@
           <a:lstStyle/>
           <a:p>
             <a:r>
-              <a:t>Ключевой показатель 47</a:t>
-            </a:r>
-          </a:p>
-          <a:p>
-            <a:pPr lvl="1">
-              <a:defRPr sz="1800"/>
-            </a:pPr>
-            <a:r>
-              <a:t>Пояснение 47.1</a:t>
-            </a:r>
-          </a:p>
-          <a:p>
-            <a:pPr lvl="1">
-              <a:defRPr sz="1800"/>
-            </a:pPr>
-            <a:r>
-              <a:t>Пояснение 47.2</a:t>
+              <a:t>Перевести 60% договоров в электронный вид</a:t>
+            </a:r>
+          </a:p>
+          <a:p>
+            <a:pPr lvl="1"/>
+            <a:r>
+              <a:t>Сократить срок согласования до 4 дней</a:t>
+            </a:r>
+          </a:p>
+          <a:p>
+            <a:pPr lvl="1"/>
+            <a:r>
+              <a:t>Запустить реестр в общем доступе</a:t>
+            </a:r>
+          </a:p>
+          <a:p>
+            <a:pPr lvl="1"/>
+            <a:r>
+              <a:t>Раздел 48: показатель за период — 2976 условных единиц</a:t>
             </a:r>
           </a:p>
         </p:txBody>
@@ -6415,7 +6523,7 @@
           <a:lstStyle/>
           <a:p>
             <a:r>
-              <a:t>Раздел 48</a:t>
+              <a:t>Слайд 49. Бюджет проекта</a:t>
             </a:r>
           </a:p>
         </p:txBody>
@@ -6436,23 +6544,25 @@
           <a:lstStyle/>
           <a:p>
             <a:r>
-              <a:t>Ключевой показатель 48</a:t>
-            </a:r>
-          </a:p>
-          <a:p>
-            <a:pPr lvl="1">
-              <a:defRPr sz="1800"/>
-            </a:pPr>
-            <a:r>
-              <a:t>Пояснение 48.1</a:t>
-            </a:r>
-          </a:p>
-          <a:p>
-            <a:pPr lvl="1">
-              <a:defRPr sz="1800"/>
-            </a:pPr>
-            <a:r>
-              <a:t>Пояснение 48.2</a:t>
+              <a:t>Расходы на лицензии — 18 400 BYN</a:t>
+            </a:r>
+          </a:p>
+          <a:p>
+            <a:pPr lvl="1"/>
+            <a:r>
+              <a:t>Обучение — 6 200 BYN</a:t>
+            </a:r>
+          </a:p>
+          <a:p>
+            <a:pPr lvl="1"/>
+            <a:r>
+              <a:t>Резерв — 5 000 BYN</a:t>
+            </a:r>
+          </a:p>
+          <a:p>
+            <a:pPr lvl="1"/>
+            <a:r>
+              <a:t>Раздел 49: показатель за период — 3013 условных единиц</a:t>
             </a:r>
           </a:p>
         </p:txBody>
@@ -6491,7 +6601,7 @@
           <a:lstStyle/>
           <a:p>
             <a:r>
-              <a:t>Раздел 4</a:t>
+              <a:t>Слайд 05. Просроченная задолженность</a:t>
             </a:r>
           </a:p>
         </p:txBody>
@@ -6512,23 +6622,25 @@
           <a:lstStyle/>
           <a:p>
             <a:r>
-              <a:t>Ключевой показатель 4</a:t>
-            </a:r>
-          </a:p>
-          <a:p>
-            <a:pPr lvl="1">
-              <a:defRPr sz="1800"/>
-            </a:pPr>
-            <a:r>
-              <a:t>Пояснение 4.1</a:t>
-            </a:r>
-          </a:p>
-          <a:p>
-            <a:pPr lvl="1">
-              <a:defRPr sz="1800"/>
-            </a:pPr>
-            <a:r>
-              <a:t>Пояснение 4.2</a:t>
+              <a:t>Всего 4 договора</a:t>
+            </a:r>
+          </a:p>
+          <a:p>
+            <a:pPr lvl="1"/>
+            <a:r>
+              <a:t>Средний срок просрочки — 11 дней</a:t>
+            </a:r>
+          </a:p>
+          <a:p>
+            <a:pPr lvl="1"/>
+            <a:r>
+              <a:t>Претензионная работа начата по 3 из 4</a:t>
+            </a:r>
+          </a:p>
+          <a:p>
+            <a:pPr lvl="1"/>
+            <a:r>
+              <a:t>Раздел 05: показатель за период — 1385 условных единиц</a:t>
             </a:r>
           </a:p>
         </p:txBody>
@@ -6567,7 +6679,7 @@
           <a:lstStyle/>
           <a:p>
             <a:r>
-              <a:t>Раздел 49</a:t>
+              <a:t>Слайд 50. Команда</a:t>
             </a:r>
           </a:p>
         </p:txBody>
@@ -6588,23 +6700,25 @@
           <a:lstStyle/>
           <a:p>
             <a:r>
-              <a:t>Ключевой показатель 49</a:t>
-            </a:r>
-          </a:p>
-          <a:p>
-            <a:pPr lvl="1">
-              <a:defRPr sz="1800"/>
-            </a:pPr>
-            <a:r>
-              <a:t>Пояснение 49.1</a:t>
-            </a:r>
-          </a:p>
-          <a:p>
-            <a:pPr lvl="1">
-              <a:defRPr sz="1800"/>
-            </a:pPr>
-            <a:r>
-              <a:t>Пояснение 49.2</a:t>
+              <a:t>Руководитель проекта — П. П. Петров</a:t>
+            </a:r>
+          </a:p>
+          <a:p>
+            <a:pPr lvl="1"/>
+            <a:r>
+              <a:t>Аналитик — А. В. Кузнецова</a:t>
+            </a:r>
+          </a:p>
+          <a:p>
+            <a:pPr lvl="1"/>
+            <a:r>
+              <a:t>Юрист — С. С. Сидоров</a:t>
+            </a:r>
+          </a:p>
+          <a:p>
+            <a:pPr lvl="1"/>
+            <a:r>
+              <a:t>Раздел 50: показатель за период — 3050 условных единиц</a:t>
             </a:r>
           </a:p>
         </p:txBody>
@@ -6643,7 +6757,7 @@
           <a:lstStyle/>
           <a:p>
             <a:r>
-              <a:t>Раздел 50</a:t>
+              <a:t>Слайд 51. Метрики (KPI)</a:t>
             </a:r>
           </a:p>
         </p:txBody>
@@ -6664,23 +6778,25 @@
           <a:lstStyle/>
           <a:p>
             <a:r>
-              <a:t>Ключевой показатель 50</a:t>
-            </a:r>
-          </a:p>
-          <a:p>
-            <a:pPr lvl="1">
-              <a:defRPr sz="1800"/>
-            </a:pPr>
-            <a:r>
-              <a:t>Пояснение 50.1</a:t>
-            </a:r>
-          </a:p>
-          <a:p>
-            <a:pPr lvl="1">
-              <a:defRPr sz="1800"/>
-            </a:pPr>
-            <a:r>
-              <a:t>Пояснение 50.2</a:t>
+              <a:t>Time to sign — 6 дней</a:t>
+            </a:r>
+          </a:p>
+          <a:p>
+            <a:pPr lvl="1"/>
+            <a:r>
+              <a:t>Contract coverage — 92%</a:t>
+            </a:r>
+          </a:p>
+          <a:p>
+            <a:pPr lvl="1"/>
+            <a:r>
+              <a:t>Renewal rate — 78%</a:t>
+            </a:r>
+          </a:p>
+          <a:p>
+            <a:pPr lvl="1"/>
+            <a:r>
+              <a:t>Раздел 51: показатель за период — 3087 условных единиц</a:t>
             </a:r>
           </a:p>
         </p:txBody>
@@ -6719,7 +6835,7 @@
           <a:lstStyle/>
           <a:p>
             <a:r>
-              <a:t>Раздел 51</a:t>
+              <a:t>Слайд 52. Итоги квартала</a:t>
             </a:r>
           </a:p>
         </p:txBody>
@@ -6740,23 +6856,25 @@
           <a:lstStyle/>
           <a:p>
             <a:r>
-              <a:t>Ключевой показатель 51</a:t>
-            </a:r>
-          </a:p>
-          <a:p>
-            <a:pPr lvl="1">
-              <a:defRPr sz="1800"/>
-            </a:pPr>
-            <a:r>
-              <a:t>Пояснение 51.1</a:t>
-            </a:r>
-          </a:p>
-          <a:p>
-            <a:pPr lvl="1">
-              <a:defRPr sz="1800"/>
-            </a:pPr>
-            <a:r>
-              <a:t>Пояснение 51.2</a:t>
+              <a:t>Выручка выросла на 12% к предыдущему кварталу</a:t>
+            </a:r>
+          </a:p>
+          <a:p>
+            <a:pPr lvl="1"/>
+            <a:r>
+              <a:t>Подписано 8 новых договоров</a:t>
+            </a:r>
+          </a:p>
+          <a:p>
+            <a:pPr lvl="1"/>
+            <a:r>
+              <a:t>Средний срок согласования — 6 рабочих дней</a:t>
+            </a:r>
+          </a:p>
+          <a:p>
+            <a:pPr lvl="1"/>
+            <a:r>
+              <a:t>Раздел 52: показатель за период — 3124 условных единиц</a:t>
             </a:r>
           </a:p>
         </p:txBody>
@@ -6795,7 +6913,7 @@
           <a:lstStyle/>
           <a:p>
             <a:r>
-              <a:t>Раздел 52</a:t>
+              <a:t>Слайд 53. Структура портфеля</a:t>
             </a:r>
           </a:p>
         </p:txBody>
@@ -6816,23 +6934,25 @@
           <a:lstStyle/>
           <a:p>
             <a:r>
-              <a:t>Ключевой показатель 52</a:t>
-            </a:r>
-          </a:p>
-          <a:p>
-            <a:pPr lvl="1">
-              <a:defRPr sz="1800"/>
-            </a:pPr>
-            <a:r>
-              <a:t>Пояснение 52.1</a:t>
-            </a:r>
-          </a:p>
-          <a:p>
-            <a:pPr lvl="1">
-              <a:defRPr sz="1800"/>
-            </a:pPr>
-            <a:r>
-              <a:t>Пояснение 52.2</a:t>
+              <a:t>Услуги — 54%</a:t>
+            </a:r>
+          </a:p>
+          <a:p>
+            <a:pPr lvl="1"/>
+            <a:r>
+              <a:t>Поставка — 31%</a:t>
+            </a:r>
+          </a:p>
+          <a:p>
+            <a:pPr lvl="1"/>
+            <a:r>
+              <a:t>Аренда — 15%</a:t>
+            </a:r>
+          </a:p>
+          <a:p>
+            <a:pPr lvl="1"/>
+            <a:r>
+              <a:t>Раздел 53: показатель за период — 3161 условных единиц</a:t>
             </a:r>
           </a:p>
         </p:txBody>
@@ -6871,7 +6991,7 @@
           <a:lstStyle/>
           <a:p>
             <a:r>
-              <a:t>Раздел 53</a:t>
+              <a:t>Слайд 54. Ключевые контрагенты</a:t>
             </a:r>
           </a:p>
         </p:txBody>
@@ -6892,23 +7012,25 @@
           <a:lstStyle/>
           <a:p>
             <a:r>
-              <a:t>Ключевой показатель 53</a:t>
-            </a:r>
-          </a:p>
-          <a:p>
-            <a:pPr lvl="1">
-              <a:defRPr sz="1800"/>
-            </a:pPr>
-            <a:r>
-              <a:t>Пояснение 53.1</a:t>
-            </a:r>
-          </a:p>
-          <a:p>
-            <a:pPr lvl="1">
-              <a:defRPr sz="1800"/>
-            </a:pPr>
-            <a:r>
-              <a:t>Пояснение 53.2</a:t>
+              <a:t>ООО «Василёк»</a:t>
+            </a:r>
+          </a:p>
+          <a:p>
+            <a:pPr lvl="1"/>
+            <a:r>
+              <a:t>ЗАО «Тестовый Мост»</a:t>
+            </a:r>
+          </a:p>
+          <a:p>
+            <a:pPr lvl="1"/>
+            <a:r>
+              <a:t>ООО «ТехноСфера-Плюс»</a:t>
+            </a:r>
+          </a:p>
+          <a:p>
+            <a:pPr lvl="1"/>
+            <a:r>
+              <a:t>Раздел 54: показатель за период — 3198 условных единиц</a:t>
             </a:r>
           </a:p>
         </p:txBody>
@@ -6947,7 +7069,7 @@
           <a:lstStyle/>
           <a:p>
             <a:r>
-              <a:t>Раздел 54</a:t>
+              <a:t>Слайд 55. Просроченная задолженность</a:t>
             </a:r>
           </a:p>
         </p:txBody>
@@ -6968,23 +7090,25 @@
           <a:lstStyle/>
           <a:p>
             <a:r>
-              <a:t>Ключевой показатель 54</a:t>
-            </a:r>
-          </a:p>
-          <a:p>
-            <a:pPr lvl="1">
-              <a:defRPr sz="1800"/>
-            </a:pPr>
-            <a:r>
-              <a:t>Пояснение 54.1</a:t>
-            </a:r>
-          </a:p>
-          <a:p>
-            <a:pPr lvl="1">
-              <a:defRPr sz="1800"/>
-            </a:pPr>
-            <a:r>
-              <a:t>Пояснение 54.2</a:t>
+              <a:t>Всего 4 договора</a:t>
+            </a:r>
+          </a:p>
+          <a:p>
+            <a:pPr lvl="1"/>
+            <a:r>
+              <a:t>Средний срок просрочки — 11 дней</a:t>
+            </a:r>
+          </a:p>
+          <a:p>
+            <a:pPr lvl="1"/>
+            <a:r>
+              <a:t>Претензионная работа начата по 3 из 4</a:t>
+            </a:r>
+          </a:p>
+          <a:p>
+            <a:pPr lvl="1"/>
+            <a:r>
+              <a:t>Раздел 55: показатель за период — 3235 условных единиц</a:t>
             </a:r>
           </a:p>
         </p:txBody>
@@ -7023,7 +7147,7 @@
           <a:lstStyle/>
           <a:p>
             <a:r>
-              <a:t>Раздел 55</a:t>
+              <a:t>Слайд 56. Процесс согласования</a:t>
             </a:r>
           </a:p>
         </p:txBody>
@@ -7044,23 +7168,31 @@
           <a:lstStyle/>
           <a:p>
             <a:r>
-              <a:t>Ключевой показатель 55</a:t>
-            </a:r>
-          </a:p>
-          <a:p>
-            <a:pPr lvl="1">
-              <a:defRPr sz="1800"/>
-            </a:pPr>
-            <a:r>
-              <a:t>Пояснение 55.1</a:t>
-            </a:r>
-          </a:p>
-          <a:p>
-            <a:pPr lvl="1">
-              <a:defRPr sz="1800"/>
-            </a:pPr>
-            <a:r>
-              <a:t>Пояснение 55.2</a:t>
+              <a:t>Заявка</a:t>
+            </a:r>
+          </a:p>
+          <a:p>
+            <a:pPr lvl="1"/>
+            <a:r>
+              <a:t>Проверка контрагента</a:t>
+            </a:r>
+          </a:p>
+          <a:p>
+            <a:pPr lvl="1"/>
+            <a:r>
+              <a:t>Юридическая экспертиза</a:t>
+            </a:r>
+          </a:p>
+          <a:p>
+            <a:pPr lvl="1"/>
+            <a:r>
+              <a:t>Подписание</a:t>
+            </a:r>
+          </a:p>
+          <a:p>
+            <a:pPr lvl="1"/>
+            <a:r>
+              <a:t>Раздел 56: показатель за период — 3272 условных единиц</a:t>
             </a:r>
           </a:p>
         </p:txBody>
@@ -7099,7 +7231,7 @@
           <a:lstStyle/>
           <a:p>
             <a:r>
-              <a:t>Раздел 56</a:t>
+              <a:t>Слайд 57. Риски</a:t>
             </a:r>
           </a:p>
         </p:txBody>
@@ -7120,23 +7252,25 @@
           <a:lstStyle/>
           <a:p>
             <a:r>
-              <a:t>Ключевой показатель 56</a:t>
-            </a:r>
-          </a:p>
-          <a:p>
-            <a:pPr lvl="1">
-              <a:defRPr sz="1800"/>
-            </a:pPr>
-            <a:r>
-              <a:t>Пояснение 56.1</a:t>
-            </a:r>
-          </a:p>
-          <a:p>
-            <a:pPr lvl="1">
-              <a:defRPr sz="1800"/>
-            </a:pPr>
-            <a:r>
-              <a:t>Пояснение 56.2</a:t>
+              <a:t>Зависимость от одного поставщика</a:t>
+            </a:r>
+          </a:p>
+          <a:p>
+            <a:pPr lvl="1"/>
+            <a:r>
+              <a:t>Валютные колебания</a:t>
+            </a:r>
+          </a:p>
+          <a:p>
+            <a:pPr lvl="1"/>
+            <a:r>
+              <a:t>Сроки поставки оборудования</a:t>
+            </a:r>
+          </a:p>
+          <a:p>
+            <a:pPr lvl="1"/>
+            <a:r>
+              <a:t>Раздел 57: показатель за период — 3309 условных единиц</a:t>
             </a:r>
           </a:p>
         </p:txBody>
@@ -7175,7 +7309,7 @@
           <a:lstStyle/>
           <a:p>
             <a:r>
-              <a:t>Раздел 57</a:t>
+              <a:t>Слайд 58. План на следующий квартал</a:t>
             </a:r>
           </a:p>
         </p:txBody>
@@ -7196,23 +7330,25 @@
           <a:lstStyle/>
           <a:p>
             <a:r>
-              <a:t>Ключевой показатель 57</a:t>
-            </a:r>
-          </a:p>
-          <a:p>
-            <a:pPr lvl="1">
-              <a:defRPr sz="1800"/>
-            </a:pPr>
-            <a:r>
-              <a:t>Пояснение 57.1</a:t>
-            </a:r>
-          </a:p>
-          <a:p>
-            <a:pPr lvl="1">
-              <a:defRPr sz="1800"/>
-            </a:pPr>
-            <a:r>
-              <a:t>Пояснение 57.2</a:t>
+              <a:t>Перевести 60% договоров в электронный вид</a:t>
+            </a:r>
+          </a:p>
+          <a:p>
+            <a:pPr lvl="1"/>
+            <a:r>
+              <a:t>Сократить срок согласования до 4 дней</a:t>
+            </a:r>
+          </a:p>
+          <a:p>
+            <a:pPr lvl="1"/>
+            <a:r>
+              <a:t>Запустить реестр в общем доступе</a:t>
+            </a:r>
+          </a:p>
+          <a:p>
+            <a:pPr lvl="1"/>
+            <a:r>
+              <a:t>Раздел 58: показатель за период — 3346 условных единиц</a:t>
             </a:r>
           </a:p>
         </p:txBody>
@@ -7251,7 +7387,7 @@
           <a:lstStyle/>
           <a:p>
             <a:r>
-              <a:t>Раздел 58</a:t>
+              <a:t>Слайд 59. Бюджет проекта</a:t>
             </a:r>
           </a:p>
         </p:txBody>
@@ -7272,23 +7408,25 @@
           <a:lstStyle/>
           <a:p>
             <a:r>
-              <a:t>Ключевой показатель 58</a:t>
-            </a:r>
-          </a:p>
-          <a:p>
-            <a:pPr lvl="1">
-              <a:defRPr sz="1800"/>
-            </a:pPr>
-            <a:r>
-              <a:t>Пояснение 58.1</a:t>
-            </a:r>
-          </a:p>
-          <a:p>
-            <a:pPr lvl="1">
-              <a:defRPr sz="1800"/>
-            </a:pPr>
-            <a:r>
-              <a:t>Пояснение 58.2</a:t>
+              <a:t>Расходы на лицензии — 18 400 BYN</a:t>
+            </a:r>
+          </a:p>
+          <a:p>
+            <a:pPr lvl="1"/>
+            <a:r>
+              <a:t>Обучение — 6 200 BYN</a:t>
+            </a:r>
+          </a:p>
+          <a:p>
+            <a:pPr lvl="1"/>
+            <a:r>
+              <a:t>Резерв — 5 000 BYN</a:t>
+            </a:r>
+          </a:p>
+          <a:p>
+            <a:pPr lvl="1"/>
+            <a:r>
+              <a:t>Раздел 59: показатель за период — 3383 условных единиц</a:t>
             </a:r>
           </a:p>
         </p:txBody>
@@ -7327,7 +7465,7 @@
           <a:lstStyle/>
           <a:p>
             <a:r>
-              <a:t>Раздел 5</a:t>
+              <a:t>Слайд 06. Процесс согласования</a:t>
             </a:r>
           </a:p>
         </p:txBody>
@@ -7348,23 +7486,31 @@
           <a:lstStyle/>
           <a:p>
             <a:r>
-              <a:t>Ключевой показатель 5</a:t>
-            </a:r>
-          </a:p>
-          <a:p>
-            <a:pPr lvl="1">
-              <a:defRPr sz="1800"/>
-            </a:pPr>
-            <a:r>
-              <a:t>Пояснение 5.1</a:t>
-            </a:r>
-          </a:p>
-          <a:p>
-            <a:pPr lvl="1">
-              <a:defRPr sz="1800"/>
-            </a:pPr>
-            <a:r>
-              <a:t>Пояснение 5.2</a:t>
+              <a:t>Заявка</a:t>
+            </a:r>
+          </a:p>
+          <a:p>
+            <a:pPr lvl="1"/>
+            <a:r>
+              <a:t>Проверка контрагента</a:t>
+            </a:r>
+          </a:p>
+          <a:p>
+            <a:pPr lvl="1"/>
+            <a:r>
+              <a:t>Юридическая экспертиза</a:t>
+            </a:r>
+          </a:p>
+          <a:p>
+            <a:pPr lvl="1"/>
+            <a:r>
+              <a:t>Подписание</a:t>
+            </a:r>
+          </a:p>
+          <a:p>
+            <a:pPr lvl="1"/>
+            <a:r>
+              <a:t>Раздел 06: показатель за период — 1422 условных единиц</a:t>
             </a:r>
           </a:p>
         </p:txBody>
@@ -7403,7 +7549,7 @@
           <a:lstStyle/>
           <a:p>
             <a:r>
-              <a:t>Раздел 59</a:t>
+              <a:t>Слайд 60. Команда</a:t>
             </a:r>
           </a:p>
         </p:txBody>
@@ -7424,23 +7570,25 @@
           <a:lstStyle/>
           <a:p>
             <a:r>
-              <a:t>Ключевой показатель 59</a:t>
-            </a:r>
-          </a:p>
-          <a:p>
-            <a:pPr lvl="1">
-              <a:defRPr sz="1800"/>
-            </a:pPr>
-            <a:r>
-              <a:t>Пояснение 59.1</a:t>
-            </a:r>
-          </a:p>
-          <a:p>
-            <a:pPr lvl="1">
-              <a:defRPr sz="1800"/>
-            </a:pPr>
-            <a:r>
-              <a:t>Пояснение 59.2</a:t>
+              <a:t>Руководитель проекта — П. П. Петров</a:t>
+            </a:r>
+          </a:p>
+          <a:p>
+            <a:pPr lvl="1"/>
+            <a:r>
+              <a:t>Аналитик — А. В. Кузнецова</a:t>
+            </a:r>
+          </a:p>
+          <a:p>
+            <a:pPr lvl="1"/>
+            <a:r>
+              <a:t>Юрист — С. С. Сидоров</a:t>
+            </a:r>
+          </a:p>
+          <a:p>
+            <a:pPr lvl="1"/>
+            <a:r>
+              <a:t>Раздел 60: показатель за период — 3420 условных единиц</a:t>
             </a:r>
           </a:p>
         </p:txBody>
@@ -7479,7 +7627,7 @@
           <a:lstStyle/>
           <a:p>
             <a:r>
-              <a:t>Раздел 6</a:t>
+              <a:t>Слайд 07. Риски</a:t>
             </a:r>
           </a:p>
         </p:txBody>
@@ -7500,23 +7648,25 @@
           <a:lstStyle/>
           <a:p>
             <a:r>
-              <a:t>Ключевой показатель 6</a:t>
-            </a:r>
-          </a:p>
-          <a:p>
-            <a:pPr lvl="1">
-              <a:defRPr sz="1800"/>
-            </a:pPr>
-            <a:r>
-              <a:t>Пояснение 6.1</a:t>
-            </a:r>
-          </a:p>
-          <a:p>
-            <a:pPr lvl="1">
-              <a:defRPr sz="1800"/>
-            </a:pPr>
-            <a:r>
-              <a:t>Пояснение 6.2</a:t>
+              <a:t>Зависимость от одного поставщика</a:t>
+            </a:r>
+          </a:p>
+          <a:p>
+            <a:pPr lvl="1"/>
+            <a:r>
+              <a:t>Валютные колебания</a:t>
+            </a:r>
+          </a:p>
+          <a:p>
+            <a:pPr lvl="1"/>
+            <a:r>
+              <a:t>Сроки поставки оборудования</a:t>
+            </a:r>
+          </a:p>
+          <a:p>
+            <a:pPr lvl="1"/>
+            <a:r>
+              <a:t>Раздел 07: показатель за период — 1459 условных единиц</a:t>
             </a:r>
           </a:p>
         </p:txBody>
@@ -7555,7 +7705,7 @@
           <a:lstStyle/>
           <a:p>
             <a:r>
-              <a:t>Раздел 7</a:t>
+              <a:t>Слайд 08. План на следующий квартал</a:t>
             </a:r>
           </a:p>
         </p:txBody>
@@ -7576,23 +7726,25 @@
           <a:lstStyle/>
           <a:p>
             <a:r>
-              <a:t>Ключевой показатель 7</a:t>
-            </a:r>
-          </a:p>
-          <a:p>
-            <a:pPr lvl="1">
-              <a:defRPr sz="1800"/>
-            </a:pPr>
-            <a:r>
-              <a:t>Пояснение 7.1</a:t>
-            </a:r>
-          </a:p>
-          <a:p>
-            <a:pPr lvl="1">
-              <a:defRPr sz="1800"/>
-            </a:pPr>
-            <a:r>
-              <a:t>Пояснение 7.2</a:t>
+              <a:t>Перевести 60% договоров в электронный вид</a:t>
+            </a:r>
+          </a:p>
+          <a:p>
+            <a:pPr lvl="1"/>
+            <a:r>
+              <a:t>Сократить срок согласования до 4 дней</a:t>
+            </a:r>
+          </a:p>
+          <a:p>
+            <a:pPr lvl="1"/>
+            <a:r>
+              <a:t>Запустить реестр в общем доступе</a:t>
+            </a:r>
+          </a:p>
+          <a:p>
+            <a:pPr lvl="1"/>
+            <a:r>
+              <a:t>Раздел 08: показатель за период — 1496 условных единиц</a:t>
             </a:r>
           </a:p>
         </p:txBody>
@@ -7631,7 +7783,7 @@
           <a:lstStyle/>
           <a:p>
             <a:r>
-              <a:t>Раздел 8</a:t>
+              <a:t>Слайд 09. Бюджет проекта</a:t>
             </a:r>
           </a:p>
         </p:txBody>
@@ -7652,23 +7804,25 @@
           <a:lstStyle/>
           <a:p>
             <a:r>
-              <a:t>Ключевой показатель 8</a:t>
-            </a:r>
-          </a:p>
-          <a:p>
-            <a:pPr lvl="1">
-              <a:defRPr sz="1800"/>
-            </a:pPr>
-            <a:r>
-              <a:t>Пояснение 8.1</a:t>
-            </a:r>
-          </a:p>
-          <a:p>
-            <a:pPr lvl="1">
-              <a:defRPr sz="1800"/>
-            </a:pPr>
-            <a:r>
-              <a:t>Пояснение 8.2</a:t>
+              <a:t>Расходы на лицензии — 18 400 BYN</a:t>
+            </a:r>
+          </a:p>
+          <a:p>
+            <a:pPr lvl="1"/>
+            <a:r>
+              <a:t>Обучение — 6 200 BYN</a:t>
+            </a:r>
+          </a:p>
+          <a:p>
+            <a:pPr lvl="1"/>
+            <a:r>
+              <a:t>Резерв — 5 000 BYN</a:t>
+            </a:r>
+          </a:p>
+          <a:p>
+            <a:pPr lvl="1"/>
+            <a:r>
+              <a:t>Раздел 09: показатель за период — 1533 условных единиц</a:t>
             </a:r>
           </a:p>
         </p:txBody>

--- a/e2e/fixtures/files/deck-many.pptx
+++ b/e2e/fixtures/files/deck-many.pptx
@@ -3379,7 +3379,7 @@
           <a:lstStyle/>
           <a:p>
             <a:r>
-              <a:t>Слайд 12. Итоги квартала</a:t>
+              <a:t>Слайд 12. Итоги полугодия</a:t>
             </a:r>
           </a:p>
         </p:txBody>
@@ -3399,6 +3399,12 @@
           <a:bodyPr/>
           <a:lstStyle/>
           <a:p>
+            <a:r>
+              <a:t>Раздел 1. Ключевые показатели за период</a:t>
+            </a:r>
+          </a:p>
+          <a:p>
+            <a:pPr lvl="1"/>
             <a:r>
               <a:t>Выручка выросла на 12% к предыдущему кварталу</a:t>
             </a:r>
@@ -4009,7 +4015,7 @@
           <a:lstStyle/>
           <a:p>
             <a:r>
-              <a:t>Слайд 02. Итоги квартала</a:t>
+              <a:t>Слайд 02. Итоги полугодия</a:t>
             </a:r>
           </a:p>
         </p:txBody>
@@ -4029,6 +4035,12 @@
           <a:bodyPr/>
           <a:lstStyle/>
           <a:p>
+            <a:r>
+              <a:t>Раздел 1. Ключевые показатели за период</a:t>
+            </a:r>
+          </a:p>
+          <a:p>
+            <a:pPr lvl="1"/>
             <a:r>
               <a:t>Выручка выросла на 12% к предыдущему кварталу</a:t>
             </a:r>
@@ -4243,7 +4255,7 @@
           <a:lstStyle/>
           <a:p>
             <a:r>
-              <a:t>Слайд 22. Итоги квартала</a:t>
+              <a:t>Слайд 22. Итоги полугодия</a:t>
             </a:r>
           </a:p>
         </p:txBody>
@@ -4263,6 +4275,12 @@
           <a:bodyPr/>
           <a:lstStyle/>
           <a:p>
+            <a:r>
+              <a:t>Раздел 1. Ключевые показатели за период</a:t>
+            </a:r>
+          </a:p>
+          <a:p>
+            <a:pPr lvl="1"/>
             <a:r>
               <a:t>Выручка выросла на 12% к предыдущему кварталу</a:t>
             </a:r>
@@ -5107,7 +5125,7 @@
           <a:lstStyle/>
           <a:p>
             <a:r>
-              <a:t>Слайд 32. Итоги квартала</a:t>
+              <a:t>Слайд 32. Итоги полугодия</a:t>
             </a:r>
           </a:p>
         </p:txBody>
@@ -5127,6 +5145,12 @@
           <a:bodyPr/>
           <a:lstStyle/>
           <a:p>
+            <a:r>
+              <a:t>Раздел 1. Ключевые показатели за период</a:t>
+            </a:r>
+          </a:p>
+          <a:p>
+            <a:pPr lvl="1"/>
             <a:r>
               <a:t>Выручка выросла на 12% к предыдущему кварталу</a:t>
             </a:r>
@@ -5971,7 +5995,7 @@
           <a:lstStyle/>
           <a:p>
             <a:r>
-              <a:t>Слайд 42. Итоги квартала</a:t>
+              <a:t>Слайд 42. Итоги полугодия</a:t>
             </a:r>
           </a:p>
         </p:txBody>
@@ -5991,6 +6015,12 @@
           <a:bodyPr/>
           <a:lstStyle/>
           <a:p>
+            <a:r>
+              <a:t>Раздел 1. Ключевые показатели за период</a:t>
+            </a:r>
+          </a:p>
+          <a:p>
+            <a:pPr lvl="1"/>
             <a:r>
               <a:t>Выручка выросла на 12% к предыдущему кварталу</a:t>
             </a:r>
@@ -6835,7 +6865,7 @@
           <a:lstStyle/>
           <a:p>
             <a:r>
-              <a:t>Слайд 52. Итоги квартала</a:t>
+              <a:t>Слайд 52. Итоги полугодия</a:t>
             </a:r>
           </a:p>
         </p:txBody>
@@ -6855,6 +6885,12 @@
           <a:bodyPr/>
           <a:lstStyle/>
           <a:p>
+            <a:r>
+              <a:t>Раздел 1. Ключевые показатели за период</a:t>
+            </a:r>
+          </a:p>
+          <a:p>
+            <a:pPr lvl="1"/>
             <a:r>
               <a:t>Выручка выросла на 12% к предыдущему кварталу</a:t>
             </a:r>
